--- a/docs/ERPNEXT_VMS_IMPLEMENTATION_PLAN_DECK.pptx
+++ b/docs/ERPNEXT_VMS_IMPLEMENTATION_PLAN_DECK.pptx
@@ -5,20 +5,20 @@
     <p:sldMasterId id="2147483648" r:id="rId1"/>
   </p:sldMasterIdLst>
   <p:sldIdLst>
-    <p:sldId id="256" r:id="rId7"/>
-    <p:sldId id="257" r:id="rId8"/>
-    <p:sldId id="258" r:id="rId9"/>
-    <p:sldId id="259" r:id="rId10"/>
-    <p:sldId id="260" r:id="rId11"/>
-    <p:sldId id="261" r:id="rId12"/>
-    <p:sldId id="262" r:id="rId13"/>
-    <p:sldId id="263" r:id="rId14"/>
-    <p:sldId id="264" r:id="rId15"/>
-    <p:sldId id="265" r:id="rId16"/>
-    <p:sldId id="266" r:id="rId17"/>
-    <p:sldId id="267" r:id="rId18"/>
+    <p:sldId id="256" r:id="rId2"/>
+    <p:sldId id="257" r:id="rId3"/>
+    <p:sldId id="258" r:id="rId4"/>
+    <p:sldId id="259" r:id="rId5"/>
+    <p:sldId id="260" r:id="rId6"/>
+    <p:sldId id="261" r:id="rId7"/>
+    <p:sldId id="262" r:id="rId8"/>
+    <p:sldId id="263" r:id="rId9"/>
+    <p:sldId id="264" r:id="rId10"/>
+    <p:sldId id="265" r:id="rId11"/>
+    <p:sldId id="266" r:id="rId12"/>
+    <p:sldId id="267" r:id="rId13"/>
   </p:sldIdLst>
-  <p:sldSz cx="12191695" cy="6858000" type="screen4x3"/>
+  <p:sldSz cx="12192000" cy="6858000"/>
   <p:notesSz cx="6858000" cy="9144000"/>
   <p:defaultTextStyle>
     <a:defPPr>
@@ -115,6 +115,22 @@
       </a:defRPr>
     </a:lvl9pPr>
   </p:defaultTextStyle>
+  <p:extLst>
+    <p:ext uri="{EFAFB233-063F-42B5-8137-9DF3F51BA10A}">
+      <p15:sldGuideLst xmlns:p15="http://schemas.microsoft.com/office/powerpoint/2012/main">
+        <p15:guide id="1" orient="horz" pos="2160">
+          <p15:clr>
+            <a:srgbClr val="A4A3A4"/>
+          </p15:clr>
+        </p15:guide>
+        <p15:guide id="2" pos="2880">
+          <p15:clr>
+            <a:srgbClr val="A4A3A4"/>
+          </p15:clr>
+        </p15:guide>
+      </p15:sldGuideLst>
+    </p:ext>
+  </p:extLst>
 </p:presentation>
 </file>
 
@@ -156,10 +172,9 @@
           <a:lstStyle/>
           <a:p>
             <a:r>
-              <a:rPr lang="en-US" smtClean="0"/>
+              <a:rPr lang="en-US"/>
               <a:t>Click to edit Master title style</a:t>
             </a:r>
-            <a:endParaRPr lang="en-US"/>
           </a:p>
         </p:txBody>
       </p:sp>
@@ -275,10 +290,9 @@
           </a:lstStyle>
           <a:p>
             <a:r>
-              <a:rPr lang="en-US" smtClean="0"/>
+              <a:rPr lang="en-US"/>
               <a:t>Click to edit Master subtitle style</a:t>
             </a:r>
-            <a:endParaRPr lang="en-US"/>
           </a:p>
         </p:txBody>
       </p:sp>
@@ -299,7 +313,7 @@
           <a:p>
             <a:fld id="{5BCAD085-E8A6-8845-BD4E-CB4CCA059FC4}" type="datetimeFigureOut">
               <a:rPr lang="en-US" smtClean="0"/>
-              <a:t>1/27/13</a:t>
+              <a:t>9/10/2026</a:t>
             </a:fld>
             <a:endParaRPr lang="en-US"/>
           </a:p>
@@ -393,10 +407,9 @@
           <a:lstStyle/>
           <a:p>
             <a:r>
-              <a:rPr lang="en-US" smtClean="0"/>
+              <a:rPr lang="en-US"/>
               <a:t>Click to edit Master title style</a:t>
             </a:r>
-            <a:endParaRPr lang="en-US"/>
           </a:p>
         </p:txBody>
       </p:sp>
@@ -417,38 +430,37 @@
           <a:p>
             <a:pPr lvl="0"/>
             <a:r>
-              <a:rPr lang="en-US" smtClean="0"/>
+              <a:rPr lang="en-US"/>
               <a:t>Click to edit Master text styles</a:t>
             </a:r>
           </a:p>
           <a:p>
             <a:pPr lvl="1"/>
             <a:r>
-              <a:rPr lang="en-US" smtClean="0"/>
+              <a:rPr lang="en-US"/>
               <a:t>Second level</a:t>
             </a:r>
           </a:p>
           <a:p>
             <a:pPr lvl="2"/>
             <a:r>
-              <a:rPr lang="en-US" smtClean="0"/>
+              <a:rPr lang="en-US"/>
               <a:t>Third level</a:t>
             </a:r>
           </a:p>
           <a:p>
             <a:pPr lvl="3"/>
             <a:r>
-              <a:rPr lang="en-US" smtClean="0"/>
+              <a:rPr lang="en-US"/>
               <a:t>Fourth level</a:t>
             </a:r>
           </a:p>
           <a:p>
             <a:pPr lvl="4"/>
             <a:r>
-              <a:rPr lang="en-US" smtClean="0"/>
+              <a:rPr lang="en-US"/>
               <a:t>Fifth level</a:t>
             </a:r>
-            <a:endParaRPr lang="en-US"/>
           </a:p>
         </p:txBody>
       </p:sp>
@@ -469,7 +481,7 @@
           <a:p>
             <a:fld id="{5BCAD085-E8A6-8845-BD4E-CB4CCA059FC4}" type="datetimeFigureOut">
               <a:rPr lang="en-US" smtClean="0"/>
-              <a:t>1/27/13</a:t>
+              <a:t>9/10/2026</a:t>
             </a:fld>
             <a:endParaRPr lang="en-US"/>
           </a:p>
@@ -568,10 +580,9 @@
           <a:lstStyle/>
           <a:p>
             <a:r>
-              <a:rPr lang="en-US" smtClean="0"/>
+              <a:rPr lang="en-US"/>
               <a:t>Click to edit Master title style</a:t>
             </a:r>
-            <a:endParaRPr lang="en-US"/>
           </a:p>
         </p:txBody>
       </p:sp>
@@ -597,38 +608,37 @@
           <a:p>
             <a:pPr lvl="0"/>
             <a:r>
-              <a:rPr lang="en-US" smtClean="0"/>
+              <a:rPr lang="en-US"/>
               <a:t>Click to edit Master text styles</a:t>
             </a:r>
           </a:p>
           <a:p>
             <a:pPr lvl="1"/>
             <a:r>
-              <a:rPr lang="en-US" smtClean="0"/>
+              <a:rPr lang="en-US"/>
               <a:t>Second level</a:t>
             </a:r>
           </a:p>
           <a:p>
             <a:pPr lvl="2"/>
             <a:r>
-              <a:rPr lang="en-US" smtClean="0"/>
+              <a:rPr lang="en-US"/>
               <a:t>Third level</a:t>
             </a:r>
           </a:p>
           <a:p>
             <a:pPr lvl="3"/>
             <a:r>
-              <a:rPr lang="en-US" smtClean="0"/>
+              <a:rPr lang="en-US"/>
               <a:t>Fourth level</a:t>
             </a:r>
           </a:p>
           <a:p>
             <a:pPr lvl="4"/>
             <a:r>
-              <a:rPr lang="en-US" smtClean="0"/>
+              <a:rPr lang="en-US"/>
               <a:t>Fifth level</a:t>
             </a:r>
-            <a:endParaRPr lang="en-US"/>
           </a:p>
         </p:txBody>
       </p:sp>
@@ -649,7 +659,7 @@
           <a:p>
             <a:fld id="{5BCAD085-E8A6-8845-BD4E-CB4CCA059FC4}" type="datetimeFigureOut">
               <a:rPr lang="en-US" smtClean="0"/>
-              <a:t>1/27/13</a:t>
+              <a:t>9/10/2026</a:t>
             </a:fld>
             <a:endParaRPr lang="en-US"/>
           </a:p>
@@ -743,10 +753,9 @@
           <a:lstStyle/>
           <a:p>
             <a:r>
-              <a:rPr lang="en-US" smtClean="0"/>
+              <a:rPr lang="en-US"/>
               <a:t>Click to edit Master title style</a:t>
             </a:r>
-            <a:endParaRPr lang="en-US"/>
           </a:p>
         </p:txBody>
       </p:sp>
@@ -767,38 +776,37 @@
           <a:p>
             <a:pPr lvl="0"/>
             <a:r>
-              <a:rPr lang="en-US" smtClean="0"/>
+              <a:rPr lang="en-US"/>
               <a:t>Click to edit Master text styles</a:t>
             </a:r>
           </a:p>
           <a:p>
             <a:pPr lvl="1"/>
             <a:r>
-              <a:rPr lang="en-US" smtClean="0"/>
+              <a:rPr lang="en-US"/>
               <a:t>Second level</a:t>
             </a:r>
           </a:p>
           <a:p>
             <a:pPr lvl="2"/>
             <a:r>
-              <a:rPr lang="en-US" smtClean="0"/>
+              <a:rPr lang="en-US"/>
               <a:t>Third level</a:t>
             </a:r>
           </a:p>
           <a:p>
             <a:pPr lvl="3"/>
             <a:r>
-              <a:rPr lang="en-US" smtClean="0"/>
+              <a:rPr lang="en-US"/>
               <a:t>Fourth level</a:t>
             </a:r>
           </a:p>
           <a:p>
             <a:pPr lvl="4"/>
             <a:r>
-              <a:rPr lang="en-US" smtClean="0"/>
+              <a:rPr lang="en-US"/>
               <a:t>Fifth level</a:t>
             </a:r>
-            <a:endParaRPr lang="en-US"/>
           </a:p>
         </p:txBody>
       </p:sp>
@@ -819,7 +827,7 @@
           <a:p>
             <a:fld id="{5BCAD085-E8A6-8845-BD4E-CB4CCA059FC4}" type="datetimeFigureOut">
               <a:rPr lang="en-US" smtClean="0"/>
-              <a:t>1/27/13</a:t>
+              <a:t>9/10/2026</a:t>
             </a:fld>
             <a:endParaRPr lang="en-US"/>
           </a:p>
@@ -922,10 +930,9 @@
           </a:lstStyle>
           <a:p>
             <a:r>
-              <a:rPr lang="en-US" smtClean="0"/>
+              <a:rPr lang="en-US"/>
               <a:t>Click to edit Master title style</a:t>
             </a:r>
-            <a:endParaRPr lang="en-US"/>
           </a:p>
         </p:txBody>
       </p:sp>
@@ -1042,7 +1049,7 @@
           <a:p>
             <a:pPr lvl="0"/>
             <a:r>
-              <a:rPr lang="en-US" smtClean="0"/>
+              <a:rPr lang="en-US"/>
               <a:t>Click to edit Master text styles</a:t>
             </a:r>
           </a:p>
@@ -1065,7 +1072,7 @@
           <a:p>
             <a:fld id="{5BCAD085-E8A6-8845-BD4E-CB4CCA059FC4}" type="datetimeFigureOut">
               <a:rPr lang="en-US" smtClean="0"/>
-              <a:t>1/27/13</a:t>
+              <a:t>9/10/2026</a:t>
             </a:fld>
             <a:endParaRPr lang="en-US"/>
           </a:p>
@@ -1159,10 +1166,9 @@
           <a:lstStyle/>
           <a:p>
             <a:r>
-              <a:rPr lang="en-US" smtClean="0"/>
+              <a:rPr lang="en-US"/>
               <a:t>Click to edit Master title style</a:t>
             </a:r>
-            <a:endParaRPr lang="en-US"/>
           </a:p>
         </p:txBody>
       </p:sp>
@@ -1216,38 +1222,37 @@
           <a:p>
             <a:pPr lvl="0"/>
             <a:r>
-              <a:rPr lang="en-US" smtClean="0"/>
+              <a:rPr lang="en-US"/>
               <a:t>Click to edit Master text styles</a:t>
             </a:r>
           </a:p>
           <a:p>
             <a:pPr lvl="1"/>
             <a:r>
-              <a:rPr lang="en-US" smtClean="0"/>
+              <a:rPr lang="en-US"/>
               <a:t>Second level</a:t>
             </a:r>
           </a:p>
           <a:p>
             <a:pPr lvl="2"/>
             <a:r>
-              <a:rPr lang="en-US" smtClean="0"/>
+              <a:rPr lang="en-US"/>
               <a:t>Third level</a:t>
             </a:r>
           </a:p>
           <a:p>
             <a:pPr lvl="3"/>
             <a:r>
-              <a:rPr lang="en-US" smtClean="0"/>
+              <a:rPr lang="en-US"/>
               <a:t>Fourth level</a:t>
             </a:r>
           </a:p>
           <a:p>
             <a:pPr lvl="4"/>
             <a:r>
-              <a:rPr lang="en-US" smtClean="0"/>
+              <a:rPr lang="en-US"/>
               <a:t>Fifth level</a:t>
             </a:r>
-            <a:endParaRPr lang="en-US"/>
           </a:p>
         </p:txBody>
       </p:sp>
@@ -1301,38 +1306,37 @@
           <a:p>
             <a:pPr lvl="0"/>
             <a:r>
-              <a:rPr lang="en-US" smtClean="0"/>
+              <a:rPr lang="en-US"/>
               <a:t>Click to edit Master text styles</a:t>
             </a:r>
           </a:p>
           <a:p>
             <a:pPr lvl="1"/>
             <a:r>
-              <a:rPr lang="en-US" smtClean="0"/>
+              <a:rPr lang="en-US"/>
               <a:t>Second level</a:t>
             </a:r>
           </a:p>
           <a:p>
             <a:pPr lvl="2"/>
             <a:r>
-              <a:rPr lang="en-US" smtClean="0"/>
+              <a:rPr lang="en-US"/>
               <a:t>Third level</a:t>
             </a:r>
           </a:p>
           <a:p>
             <a:pPr lvl="3"/>
             <a:r>
-              <a:rPr lang="en-US" smtClean="0"/>
+              <a:rPr lang="en-US"/>
               <a:t>Fourth level</a:t>
             </a:r>
           </a:p>
           <a:p>
             <a:pPr lvl="4"/>
             <a:r>
-              <a:rPr lang="en-US" smtClean="0"/>
+              <a:rPr lang="en-US"/>
               <a:t>Fifth level</a:t>
             </a:r>
-            <a:endParaRPr lang="en-US"/>
           </a:p>
         </p:txBody>
       </p:sp>
@@ -1353,7 +1357,7 @@
           <a:p>
             <a:fld id="{5BCAD085-E8A6-8845-BD4E-CB4CCA059FC4}" type="datetimeFigureOut">
               <a:rPr lang="en-US" smtClean="0"/>
-              <a:t>1/27/13</a:t>
+              <a:t>9/10/2026</a:t>
             </a:fld>
             <a:endParaRPr lang="en-US"/>
           </a:p>
@@ -1451,10 +1455,9 @@
           </a:lstStyle>
           <a:p>
             <a:r>
-              <a:rPr lang="en-US" smtClean="0"/>
+              <a:rPr lang="en-US"/>
               <a:t>Click to edit Master title style</a:t>
             </a:r>
-            <a:endParaRPr lang="en-US"/>
           </a:p>
         </p:txBody>
       </p:sp>
@@ -1517,7 +1520,7 @@
           <a:p>
             <a:pPr lvl="0"/>
             <a:r>
-              <a:rPr lang="en-US" smtClean="0"/>
+              <a:rPr lang="en-US"/>
               <a:t>Click to edit Master text styles</a:t>
             </a:r>
           </a:p>
@@ -1573,38 +1576,37 @@
           <a:p>
             <a:pPr lvl="0"/>
             <a:r>
-              <a:rPr lang="en-US" smtClean="0"/>
+              <a:rPr lang="en-US"/>
               <a:t>Click to edit Master text styles</a:t>
             </a:r>
           </a:p>
           <a:p>
             <a:pPr lvl="1"/>
             <a:r>
-              <a:rPr lang="en-US" smtClean="0"/>
+              <a:rPr lang="en-US"/>
               <a:t>Second level</a:t>
             </a:r>
           </a:p>
           <a:p>
             <a:pPr lvl="2"/>
             <a:r>
-              <a:rPr lang="en-US" smtClean="0"/>
+              <a:rPr lang="en-US"/>
               <a:t>Third level</a:t>
             </a:r>
           </a:p>
           <a:p>
             <a:pPr lvl="3"/>
             <a:r>
-              <a:rPr lang="en-US" smtClean="0"/>
+              <a:rPr lang="en-US"/>
               <a:t>Fourth level</a:t>
             </a:r>
           </a:p>
           <a:p>
             <a:pPr lvl="4"/>
             <a:r>
-              <a:rPr lang="en-US" smtClean="0"/>
+              <a:rPr lang="en-US"/>
               <a:t>Fifth level</a:t>
             </a:r>
-            <a:endParaRPr lang="en-US"/>
           </a:p>
         </p:txBody>
       </p:sp>
@@ -1667,7 +1669,7 @@
           <a:p>
             <a:pPr lvl="0"/>
             <a:r>
-              <a:rPr lang="en-US" smtClean="0"/>
+              <a:rPr lang="en-US"/>
               <a:t>Click to edit Master text styles</a:t>
             </a:r>
           </a:p>
@@ -1723,38 +1725,37 @@
           <a:p>
             <a:pPr lvl="0"/>
             <a:r>
-              <a:rPr lang="en-US" smtClean="0"/>
+              <a:rPr lang="en-US"/>
               <a:t>Click to edit Master text styles</a:t>
             </a:r>
           </a:p>
           <a:p>
             <a:pPr lvl="1"/>
             <a:r>
-              <a:rPr lang="en-US" smtClean="0"/>
+              <a:rPr lang="en-US"/>
               <a:t>Second level</a:t>
             </a:r>
           </a:p>
           <a:p>
             <a:pPr lvl="2"/>
             <a:r>
-              <a:rPr lang="en-US" smtClean="0"/>
+              <a:rPr lang="en-US"/>
               <a:t>Third level</a:t>
             </a:r>
           </a:p>
           <a:p>
             <a:pPr lvl="3"/>
             <a:r>
-              <a:rPr lang="en-US" smtClean="0"/>
+              <a:rPr lang="en-US"/>
               <a:t>Fourth level</a:t>
             </a:r>
           </a:p>
           <a:p>
             <a:pPr lvl="4"/>
             <a:r>
-              <a:rPr lang="en-US" smtClean="0"/>
+              <a:rPr lang="en-US"/>
               <a:t>Fifth level</a:t>
             </a:r>
-            <a:endParaRPr lang="en-US"/>
           </a:p>
         </p:txBody>
       </p:sp>
@@ -1775,7 +1776,7 @@
           <a:p>
             <a:fld id="{5BCAD085-E8A6-8845-BD4E-CB4CCA059FC4}" type="datetimeFigureOut">
               <a:rPr lang="en-US" smtClean="0"/>
-              <a:t>1/27/13</a:t>
+              <a:t>9/10/2026</a:t>
             </a:fld>
             <a:endParaRPr lang="en-US"/>
           </a:p>
@@ -1869,10 +1870,9 @@
           <a:lstStyle/>
           <a:p>
             <a:r>
-              <a:rPr lang="en-US" smtClean="0"/>
+              <a:rPr lang="en-US"/>
               <a:t>Click to edit Master title style</a:t>
             </a:r>
-            <a:endParaRPr lang="en-US"/>
           </a:p>
         </p:txBody>
       </p:sp>
@@ -1893,7 +1893,7 @@
           <a:p>
             <a:fld id="{5BCAD085-E8A6-8845-BD4E-CB4CCA059FC4}" type="datetimeFigureOut">
               <a:rPr lang="en-US" smtClean="0"/>
-              <a:t>1/27/13</a:t>
+              <a:t>9/10/2026</a:t>
             </a:fld>
             <a:endParaRPr lang="en-US"/>
           </a:p>
@@ -1988,7 +1988,7 @@
           <a:p>
             <a:fld id="{5BCAD085-E8A6-8845-BD4E-CB4CCA059FC4}" type="datetimeFigureOut">
               <a:rPr lang="en-US" smtClean="0"/>
-              <a:t>1/27/13</a:t>
+              <a:t>9/10/2026</a:t>
             </a:fld>
             <a:endParaRPr lang="en-US"/>
           </a:p>
@@ -2091,10 +2091,9 @@
           </a:lstStyle>
           <a:p>
             <a:r>
-              <a:rPr lang="en-US" smtClean="0"/>
+              <a:rPr lang="en-US"/>
               <a:t>Click to edit Master title style</a:t>
             </a:r>
-            <a:endParaRPr lang="en-US"/>
           </a:p>
         </p:txBody>
       </p:sp>
@@ -2148,38 +2147,37 @@
           <a:p>
             <a:pPr lvl="0"/>
             <a:r>
-              <a:rPr lang="en-US" smtClean="0"/>
+              <a:rPr lang="en-US"/>
               <a:t>Click to edit Master text styles</a:t>
             </a:r>
           </a:p>
           <a:p>
             <a:pPr lvl="1"/>
             <a:r>
-              <a:rPr lang="en-US" smtClean="0"/>
+              <a:rPr lang="en-US"/>
               <a:t>Second level</a:t>
             </a:r>
           </a:p>
           <a:p>
             <a:pPr lvl="2"/>
             <a:r>
-              <a:rPr lang="en-US" smtClean="0"/>
+              <a:rPr lang="en-US"/>
               <a:t>Third level</a:t>
             </a:r>
           </a:p>
           <a:p>
             <a:pPr lvl="3"/>
             <a:r>
-              <a:rPr lang="en-US" smtClean="0"/>
+              <a:rPr lang="en-US"/>
               <a:t>Fourth level</a:t>
             </a:r>
           </a:p>
           <a:p>
             <a:pPr lvl="4"/>
             <a:r>
-              <a:rPr lang="en-US" smtClean="0"/>
+              <a:rPr lang="en-US"/>
               <a:t>Fifth level</a:t>
             </a:r>
-            <a:endParaRPr lang="en-US"/>
           </a:p>
         </p:txBody>
       </p:sp>
@@ -2242,7 +2240,7 @@
           <a:p>
             <a:pPr lvl="0"/>
             <a:r>
-              <a:rPr lang="en-US" smtClean="0"/>
+              <a:rPr lang="en-US"/>
               <a:t>Click to edit Master text styles</a:t>
             </a:r>
           </a:p>
@@ -2265,7 +2263,7 @@
           <a:p>
             <a:fld id="{5BCAD085-E8A6-8845-BD4E-CB4CCA059FC4}" type="datetimeFigureOut">
               <a:rPr lang="en-US" smtClean="0"/>
-              <a:t>1/27/13</a:t>
+              <a:t>9/10/2026</a:t>
             </a:fld>
             <a:endParaRPr lang="en-US"/>
           </a:p>
@@ -2368,10 +2366,9 @@
           </a:lstStyle>
           <a:p>
             <a:r>
-              <a:rPr lang="en-US" smtClean="0"/>
+              <a:rPr lang="en-US"/>
               <a:t>Click to edit Master title style</a:t>
             </a:r>
-            <a:endParaRPr lang="en-US"/>
           </a:p>
         </p:txBody>
       </p:sp>
@@ -2495,7 +2492,7 @@
           <a:p>
             <a:pPr lvl="0"/>
             <a:r>
-              <a:rPr lang="en-US" smtClean="0"/>
+              <a:rPr lang="en-US"/>
               <a:t>Click to edit Master text styles</a:t>
             </a:r>
           </a:p>
@@ -2518,7 +2515,7 @@
           <a:p>
             <a:fld id="{5BCAD085-E8A6-8845-BD4E-CB4CCA059FC4}" type="datetimeFigureOut">
               <a:rPr lang="en-US" smtClean="0"/>
-              <a:t>1/27/13</a:t>
+              <a:t>9/10/2026</a:t>
             </a:fld>
             <a:endParaRPr lang="en-US"/>
           </a:p>
@@ -2627,10 +2624,9 @@
           <a:lstStyle/>
           <a:p>
             <a:r>
-              <a:rPr lang="en-US" smtClean="0"/>
+              <a:rPr lang="en-US"/>
               <a:t>Click to edit Master title style</a:t>
             </a:r>
-            <a:endParaRPr lang="en-US"/>
           </a:p>
         </p:txBody>
       </p:sp>
@@ -2661,38 +2657,37 @@
           <a:p>
             <a:pPr lvl="0"/>
             <a:r>
-              <a:rPr lang="en-US" smtClean="0"/>
+              <a:rPr lang="en-US"/>
               <a:t>Click to edit Master text styles</a:t>
             </a:r>
           </a:p>
           <a:p>
             <a:pPr lvl="1"/>
             <a:r>
-              <a:rPr lang="en-US" smtClean="0"/>
+              <a:rPr lang="en-US"/>
               <a:t>Second level</a:t>
             </a:r>
           </a:p>
           <a:p>
             <a:pPr lvl="2"/>
             <a:r>
-              <a:rPr lang="en-US" smtClean="0"/>
+              <a:rPr lang="en-US"/>
               <a:t>Third level</a:t>
             </a:r>
           </a:p>
           <a:p>
             <a:pPr lvl="3"/>
             <a:r>
-              <a:rPr lang="en-US" smtClean="0"/>
+              <a:rPr lang="en-US"/>
               <a:t>Fourth level</a:t>
             </a:r>
           </a:p>
           <a:p>
             <a:pPr lvl="4"/>
             <a:r>
-              <a:rPr lang="en-US" smtClean="0"/>
+              <a:rPr lang="en-US"/>
               <a:t>Fifth level</a:t>
             </a:r>
-            <a:endParaRPr lang="en-US"/>
           </a:p>
         </p:txBody>
       </p:sp>
@@ -2731,7 +2726,7 @@
           <a:p>
             <a:fld id="{5BCAD085-E8A6-8845-BD4E-CB4CCA059FC4}" type="datetimeFigureOut">
               <a:rPr lang="en-US" smtClean="0"/>
-              <a:t>1/27/13</a:t>
+              <a:t>9/10/2026</a:t>
             </a:fld>
             <a:endParaRPr lang="en-US"/>
           </a:p>
@@ -3090,7 +3085,7 @@
 </file>
 
 <file path=ppt/slides/slide1.xml><?xml version="1.0" encoding="utf-8"?>
-<p:sld xmlns:a="http://schemas.openxmlformats.org/drawingml/2006/main" xmlns:p="http://schemas.openxmlformats.org/presentationml/2006/main" xmlns:r="http://schemas.openxmlformats.org/officeDocument/2006/relationships">
+<p:sld xmlns:a="http://schemas.openxmlformats.org/drawingml/2006/main" xmlns:r="http://schemas.openxmlformats.org/officeDocument/2006/relationships" xmlns:p="http://schemas.openxmlformats.org/presentationml/2006/main">
   <p:cSld>
     <p:bg>
       <p:bgPr>
@@ -3106,7 +3101,14 @@
         <p:cNvGrpSpPr/>
         <p:nvPr/>
       </p:nvGrpSpPr>
-      <p:grpSpPr/>
+      <p:grpSpPr>
+        <a:xfrm>
+          <a:off x="0" y="0"/>
+          <a:ext cx="0" cy="0"/>
+          <a:chOff x="0" y="0"/>
+          <a:chExt cx="0" cy="0"/>
+        </a:xfrm>
+      </p:grpSpPr>
       <p:sp>
         <p:nvSpPr>
           <p:cNvPr id="2" name="Rounded Rectangle 1"/>
@@ -3149,6 +3151,7 @@
           <a:lstStyle/>
           <a:p>
             <a:pPr algn="ctr"/>
+            <a:endParaRPr/>
           </a:p>
         </p:txBody>
       </p:sp>
@@ -3215,7 +3218,7 @@
         <p:spPr>
           <a:xfrm>
             <a:off x="1280160" y="2468880"/>
-            <a:ext cx="9601200" cy="1371600"/>
+            <a:ext cx="9601200" cy="995144"/>
           </a:xfrm>
           <a:prstGeom prst="rect">
             <a:avLst/>
@@ -3237,7 +3240,12 @@
               </a:defRPr>
             </a:pPr>
             <a:r>
-              <a:t>ERPNext &amp; Vehicle Management System</a:t>
+              <a:rPr dirty="0" err="1"/>
+              <a:t>ERPNext</a:t>
+            </a:r>
+            <a:r>
+              <a:rPr dirty="0"/>
+              <a:t> &amp; Vehicle Management System</a:t>
             </a:r>
           </a:p>
           <a:p>
@@ -3252,7 +3260,8 @@
               </a:defRPr>
             </a:pPr>
             <a:r>
-              <a:t>Comprehensive Network Implementation Plan &amp; Scope of Work</a:t>
+              <a:rPr dirty="0"/>
+              <a:t>Implementation Plan &amp; Scope of Work</a:t>
             </a:r>
           </a:p>
         </p:txBody>
@@ -3266,7 +3275,7 @@
         <p:spPr>
           <a:xfrm>
             <a:off x="1280160" y="4114800"/>
-            <a:ext cx="9601200" cy="1188720"/>
+            <a:ext cx="9601200" cy="784830"/>
           </a:xfrm>
           <a:prstGeom prst="rect">
             <a:avLst/>
@@ -3287,6 +3296,7 @@
               </a:defRPr>
             </a:pPr>
             <a:r>
+              <a:rPr dirty="0"/>
               <a:t>• Scope of Work: 7 Service Branches &amp; 3 Central Warehouses Network</a:t>
             </a:r>
           </a:p>
@@ -3299,7 +3309,16 @@
               </a:defRPr>
             </a:pPr>
             <a:r>
-              <a:t>• Focus: Phase 1 Prototype Deployment at Automan Car Care Center</a:t>
+              <a:rPr dirty="0"/>
+              <a:t>• Focus: Phase 1 Prototype Deployment at </a:t>
+            </a:r>
+            <a:r>
+              <a:rPr dirty="0" err="1"/>
+              <a:t>Automan</a:t>
+            </a:r>
+            <a:r>
+              <a:rPr dirty="0"/>
+              <a:t> Car Care Center</a:t>
             </a:r>
           </a:p>
           <a:p>
@@ -3314,7 +3333,16 @@
               </a:defRPr>
             </a:pPr>
             <a:r>
-              <a:t>• Integrated Modules: VMS Operations, POS Cashiering, BIR CAS Tax Suite, Intercompany Hub, Bin Barcoding</a:t>
+              <a:rPr dirty="0"/>
+              <a:t>• Integrated Modules: VMS Operations, POS Cashiering, BIR </a:t>
+            </a:r>
+            <a:r>
+              <a:rPr lang="en-US" dirty="0"/>
+              <a:t>Reports</a:t>
+            </a:r>
+            <a:r>
+              <a:rPr dirty="0"/>
+              <a:t>, Intercompany Hub, Bin Barcoding</a:t>
             </a:r>
           </a:p>
         </p:txBody>
@@ -3328,7 +3356,7 @@
 </file>
 
 <file path=ppt/slides/slide10.xml><?xml version="1.0" encoding="utf-8"?>
-<p:sld xmlns:a="http://schemas.openxmlformats.org/drawingml/2006/main" xmlns:p="http://schemas.openxmlformats.org/presentationml/2006/main" xmlns:r="http://schemas.openxmlformats.org/officeDocument/2006/relationships">
+<p:sld xmlns:a="http://schemas.openxmlformats.org/drawingml/2006/main" xmlns:r="http://schemas.openxmlformats.org/officeDocument/2006/relationships" xmlns:p="http://schemas.openxmlformats.org/presentationml/2006/main">
   <p:cSld>
     <p:bg>
       <p:bgPr>
@@ -3344,7 +3372,14 @@
         <p:cNvGrpSpPr/>
         <p:nvPr/>
       </p:nvGrpSpPr>
-      <p:grpSpPr/>
+      <p:grpSpPr>
+        <a:xfrm>
+          <a:off x="0" y="0"/>
+          <a:ext cx="0" cy="0"/>
+          <a:chOff x="0" y="0"/>
+          <a:chExt cx="0" cy="0"/>
+        </a:xfrm>
+      </p:grpSpPr>
       <p:sp>
         <p:nvSpPr>
           <p:cNvPr id="2" name="TextBox 1"/>
@@ -3495,6 +3530,7 @@
           <a:lstStyle/>
           <a:p>
             <a:pPr algn="ctr"/>
+            <a:endParaRPr/>
           </a:p>
         </p:txBody>
       </p:sp>
@@ -3689,6 +3725,7 @@
           <a:lstStyle/>
           <a:p>
             <a:pPr algn="ctr"/>
+            <a:endParaRPr/>
           </a:p>
         </p:txBody>
       </p:sp>
@@ -3883,6 +3920,7 @@
           <a:lstStyle/>
           <a:p>
             <a:pPr algn="ctr"/>
+            <a:endParaRPr/>
           </a:p>
         </p:txBody>
       </p:sp>
@@ -3949,7 +3987,7 @@
         <p:spPr>
           <a:xfrm>
             <a:off x="6318504" y="2423160"/>
-            <a:ext cx="2286000" cy="3566160"/>
+            <a:ext cx="2286000" cy="1938992"/>
           </a:xfrm>
           <a:prstGeom prst="rect">
             <a:avLst/>
@@ -3970,7 +4008,24 @@
               </a:defRPr>
             </a:pPr>
             <a:r>
-              <a:t>• Link Automan replenishment to Dau Warehouse</a:t>
+              <a:rPr dirty="0"/>
+              <a:t>• Link </a:t>
+            </a:r>
+            <a:r>
+              <a:rPr dirty="0" err="1"/>
+              <a:t>Automan</a:t>
+            </a:r>
+            <a:r>
+              <a:rPr dirty="0"/>
+              <a:t> replenishment to </a:t>
+            </a:r>
+            <a:r>
+              <a:rPr dirty="0" err="1"/>
+              <a:t>Dau</a:t>
+            </a:r>
+            <a:r>
+              <a:rPr dirty="0"/>
+              <a:t> Warehouse</a:t>
             </a:r>
           </a:p>
           <a:p>
@@ -3985,7 +4040,32 @@
               </a:defRPr>
             </a:pPr>
             <a:r>
-              <a:t>• Test Intercompany PO $\rightarrow$ SO $\rightarrow$ DN $\rightarrow$ PI flow</a:t>
+              <a:rPr dirty="0"/>
+              <a:t>• Test Intercompany PO </a:t>
+            </a:r>
+            <a:r>
+              <a:rPr lang="en-US" dirty="0"/>
+              <a:t>&gt;</a:t>
+            </a:r>
+            <a:r>
+              <a:rPr dirty="0"/>
+              <a:t> SO </a:t>
+            </a:r>
+            <a:r>
+              <a:rPr lang="en-US" dirty="0"/>
+              <a:t>&gt;</a:t>
+            </a:r>
+            <a:r>
+              <a:rPr dirty="0"/>
+              <a:t> DN </a:t>
+            </a:r>
+            <a:r>
+              <a:rPr lang="en-US" dirty="0"/>
+              <a:t>&gt;</a:t>
+            </a:r>
+            <a:r>
+              <a:rPr dirty="0"/>
+              <a:t>PI flow</a:t>
             </a:r>
           </a:p>
           <a:p>
@@ -4000,6 +4080,7 @@
               </a:defRPr>
             </a:pPr>
             <a:r>
+              <a:rPr dirty="0"/>
               <a:t>• Generate BIR Sales Journal &amp; CRJ for pilot</a:t>
             </a:r>
           </a:p>
@@ -4015,7 +4096,16 @@
               </a:defRPr>
             </a:pPr>
             <a:r>
-              <a:t>• Verify BIR Form 2307 withholding certificates</a:t>
+              <a:rPr dirty="0"/>
+              <a:t>• Verify BIR </a:t>
+            </a:r>
+            <a:r>
+              <a:rPr lang="en-US" dirty="0"/>
+              <a:t>Report </a:t>
+            </a:r>
+            <a:r>
+              <a:rPr dirty="0"/>
+              <a:t> withholding certificates</a:t>
             </a:r>
           </a:p>
           <a:p>
@@ -4030,6 +4120,7 @@
               </a:defRPr>
             </a:pPr>
             <a:r>
+              <a:rPr dirty="0"/>
               <a:t>• Validate General Ledger &amp; P&amp;L balance accuracy</a:t>
             </a:r>
           </a:p>
@@ -4077,6 +4168,7 @@
           <a:lstStyle/>
           <a:p>
             <a:pPr algn="ctr"/>
+            <a:endParaRPr/>
           </a:p>
         </p:txBody>
       </p:sp>
@@ -4238,7 +4330,7 @@
 </file>
 
 <file path=ppt/slides/slide11.xml><?xml version="1.0" encoding="utf-8"?>
-<p:sld xmlns:a="http://schemas.openxmlformats.org/drawingml/2006/main" xmlns:p="http://schemas.openxmlformats.org/presentationml/2006/main" xmlns:r="http://schemas.openxmlformats.org/officeDocument/2006/relationships">
+<p:sld xmlns:a="http://schemas.openxmlformats.org/drawingml/2006/main" xmlns:r="http://schemas.openxmlformats.org/officeDocument/2006/relationships" xmlns:p="http://schemas.openxmlformats.org/presentationml/2006/main">
   <p:cSld>
     <p:bg>
       <p:bgPr>
@@ -4254,7 +4346,14 @@
         <p:cNvGrpSpPr/>
         <p:nvPr/>
       </p:nvGrpSpPr>
-      <p:grpSpPr/>
+      <p:grpSpPr>
+        <a:xfrm>
+          <a:off x="0" y="0"/>
+          <a:ext cx="0" cy="0"/>
+          <a:chOff x="0" y="0"/>
+          <a:chExt cx="0" cy="0"/>
+        </a:xfrm>
+      </p:grpSpPr>
       <p:sp>
         <p:nvSpPr>
           <p:cNvPr id="2" name="TextBox 1"/>
@@ -4405,6 +4504,7 @@
           <a:lstStyle/>
           <a:p>
             <a:pPr algn="ctr"/>
+            <a:endParaRPr/>
           </a:p>
         </p:txBody>
       </p:sp>
@@ -4417,7 +4517,7 @@
         <p:spPr>
           <a:xfrm>
             <a:off x="1005840" y="1828800"/>
-            <a:ext cx="4572000" cy="4114800"/>
+            <a:ext cx="4572000" cy="3200876"/>
           </a:xfrm>
           <a:prstGeom prst="rect">
             <a:avLst/>
@@ -4438,6 +4538,7 @@
               </a:defRPr>
             </a:pPr>
             <a:r>
+              <a:rPr dirty="0"/>
               <a:t>👥 Role-Based Training Matrix</a:t>
             </a:r>
           </a:p>
@@ -4453,6 +4554,7 @@
               </a:defRPr>
             </a:pPr>
             <a:r>
+              <a:rPr dirty="0"/>
               <a:t>• Service Advisors &amp; Bay Front Desk</a:t>
             </a:r>
           </a:p>
@@ -4465,6 +4567,7 @@
               </a:defRPr>
             </a:pPr>
             <a:r>
+              <a:rPr dirty="0"/>
               <a:t>   Vehicle check-in, estimate creation, inspection reports, labor allocation, and customer communication.</a:t>
             </a:r>
           </a:p>
@@ -4480,6 +4583,7 @@
               </a:defRPr>
             </a:pPr>
             <a:r>
+              <a:rPr dirty="0"/>
               <a:t>• Cashiers &amp; Counter Staff</a:t>
             </a:r>
           </a:p>
@@ -4492,7 +4596,16 @@
               </a:defRPr>
             </a:pPr>
             <a:r>
-              <a:t>   POS terminal, barcode scanning, payment reconciliation (Cash/GCash/Card), closing cash shifts.</a:t>
+              <a:rPr dirty="0"/>
+              <a:t>   POS terminal, barcode scanning, payment reconciliation (Cash/</a:t>
+            </a:r>
+            <a:r>
+              <a:rPr dirty="0" err="1"/>
+              <a:t>GCash</a:t>
+            </a:r>
+            <a:r>
+              <a:rPr dirty="0"/>
+              <a:t>/Card), closing cash shifts.</a:t>
             </a:r>
           </a:p>
           <a:p>
@@ -4507,6 +4620,7 @@
               </a:defRPr>
             </a:pPr>
             <a:r>
+              <a:rPr dirty="0"/>
               <a:t>• Warehousemen &amp; Stock Keepers</a:t>
             </a:r>
           </a:p>
@@ -4519,6 +4633,7 @@
               </a:defRPr>
             </a:pPr>
             <a:r>
+              <a:rPr dirty="0"/>
               <a:t>   Mobile barcode put-away, shelf bin scanning, material receipt, intercompany stock fulfillment.</a:t>
             </a:r>
           </a:p>
@@ -4534,6 +4649,7 @@
               </a:defRPr>
             </a:pPr>
             <a:r>
+              <a:rPr dirty="0"/>
               <a:t>• Accountants &amp; Finance Staff</a:t>
             </a:r>
           </a:p>
@@ -4546,7 +4662,16 @@
               </a:defRPr>
             </a:pPr>
             <a:r>
-              <a:t>   BIR compliance generation, 2307 withholding, journal posting, daily sales reconciliation, VAT filing.</a:t>
+              <a:rPr dirty="0"/>
+              <a:t>   BIR compliance generation, </a:t>
+            </a:r>
+            <a:r>
+              <a:rPr lang="en-US" dirty="0"/>
+              <a:t>BIR Reports</a:t>
+            </a:r>
+            <a:r>
+              <a:rPr dirty="0"/>
+              <a:t>, journal posting, daily sales reconciliation, VAT filing.</a:t>
             </a:r>
           </a:p>
           <a:p>
@@ -4561,6 +4686,7 @@
               </a:defRPr>
             </a:pPr>
             <a:r>
+              <a:rPr dirty="0"/>
               <a:t>• Executives &amp; Branch Managers</a:t>
             </a:r>
           </a:p>
@@ -4573,6 +4699,7 @@
               </a:defRPr>
             </a:pPr>
             <a:r>
+              <a:rPr dirty="0"/>
               <a:t>   Vehicle Management Analytics, branch performance tracking, margin analysis, multi-company consolidation.</a:t>
             </a:r>
           </a:p>
@@ -4620,6 +4747,7 @@
           <a:lstStyle/>
           <a:p>
             <a:pPr algn="ctr"/>
+            <a:endParaRPr/>
           </a:p>
         </p:txBody>
       </p:sp>
@@ -4802,7 +4930,7 @@
 </file>
 
 <file path=ppt/slides/slide12.xml><?xml version="1.0" encoding="utf-8"?>
-<p:sld xmlns:a="http://schemas.openxmlformats.org/drawingml/2006/main" xmlns:p="http://schemas.openxmlformats.org/presentationml/2006/main" xmlns:r="http://schemas.openxmlformats.org/officeDocument/2006/relationships">
+<p:sld xmlns:a="http://schemas.openxmlformats.org/drawingml/2006/main" xmlns:r="http://schemas.openxmlformats.org/officeDocument/2006/relationships" xmlns:p="http://schemas.openxmlformats.org/presentationml/2006/main">
   <p:cSld>
     <p:bg>
       <p:bgPr>
@@ -4818,7 +4946,14 @@
         <p:cNvGrpSpPr/>
         <p:nvPr/>
       </p:nvGrpSpPr>
-      <p:grpSpPr/>
+      <p:grpSpPr>
+        <a:xfrm>
+          <a:off x="0" y="0"/>
+          <a:ext cx="0" cy="0"/>
+          <a:chOff x="0" y="0"/>
+          <a:chExt cx="0" cy="0"/>
+        </a:xfrm>
+      </p:grpSpPr>
       <p:sp>
         <p:nvSpPr>
           <p:cNvPr id="2" name="TextBox 1"/>
@@ -4969,6 +5104,7 @@
           <a:lstStyle/>
           <a:p>
             <a:pPr algn="ctr"/>
+            <a:endParaRPr/>
           </a:p>
         </p:txBody>
       </p:sp>
@@ -5169,6 +5305,7 @@
           <a:lstStyle/>
           <a:p>
             <a:pPr algn="ctr"/>
+            <a:endParaRPr/>
           </a:p>
         </p:txBody>
       </p:sp>
@@ -5369,6 +5506,7 @@
           <a:lstStyle/>
           <a:p>
             <a:pPr algn="ctr"/>
+            <a:endParaRPr/>
           </a:p>
         </p:txBody>
       </p:sp>
@@ -5569,6 +5707,7 @@
           <a:lstStyle/>
           <a:p>
             <a:pPr algn="ctr"/>
+            <a:endParaRPr/>
           </a:p>
         </p:txBody>
       </p:sp>
@@ -5736,7 +5875,7 @@
 </file>
 
 <file path=ppt/slides/slide2.xml><?xml version="1.0" encoding="utf-8"?>
-<p:sld xmlns:a="http://schemas.openxmlformats.org/drawingml/2006/main" xmlns:p="http://schemas.openxmlformats.org/presentationml/2006/main" xmlns:r="http://schemas.openxmlformats.org/officeDocument/2006/relationships">
+<p:sld xmlns:a="http://schemas.openxmlformats.org/drawingml/2006/main" xmlns:r="http://schemas.openxmlformats.org/officeDocument/2006/relationships" xmlns:p="http://schemas.openxmlformats.org/presentationml/2006/main">
   <p:cSld>
     <p:bg>
       <p:bgPr>
@@ -5752,7 +5891,14 @@
         <p:cNvGrpSpPr/>
         <p:nvPr/>
       </p:nvGrpSpPr>
-      <p:grpSpPr/>
+      <p:grpSpPr>
+        <a:xfrm>
+          <a:off x="0" y="0"/>
+          <a:ext cx="0" cy="0"/>
+          <a:chOff x="0" y="0"/>
+          <a:chExt cx="0" cy="0"/>
+        </a:xfrm>
+      </p:grpSpPr>
       <p:sp>
         <p:nvSpPr>
           <p:cNvPr id="2" name="TextBox 1"/>
@@ -5903,6 +6049,7 @@
           <a:lstStyle/>
           <a:p>
             <a:pPr algn="ctr"/>
+            <a:endParaRPr/>
           </a:p>
         </p:txBody>
       </p:sp>
@@ -6052,6 +6199,7 @@
           <a:lstStyle/>
           <a:p>
             <a:pPr algn="ctr"/>
+            <a:endParaRPr/>
           </a:p>
         </p:txBody>
       </p:sp>
@@ -6118,7 +6266,7 @@
         <p:spPr>
           <a:xfrm>
             <a:off x="3639312" y="2423160"/>
-            <a:ext cx="2194560" cy="3566160"/>
+            <a:ext cx="2194560" cy="1631216"/>
           </a:xfrm>
           <a:prstGeom prst="rect">
             <a:avLst/>
@@ -6139,7 +6287,8 @@
               </a:defRPr>
             </a:pPr>
             <a:r>
-              <a:t>Real-Time Inventory &amp; ₱47M Stock Control</a:t>
+              <a:rPr dirty="0"/>
+              <a:t>Real-Time Inventory &amp;  Stock Control</a:t>
             </a:r>
           </a:p>
           <a:p>
@@ -6154,7 +6303,16 @@
               </a:defRPr>
             </a:pPr>
             <a:r>
-              <a:t>Live bin-level tracking, automated intercompany supply chain from Dau/Mexico central warehouses, and mobile barcode put-away &amp; picking.</a:t>
+              <a:rPr dirty="0"/>
+              <a:t>Live bin-level tracking, automated intercompany supply chain from </a:t>
+            </a:r>
+            <a:r>
+              <a:rPr dirty="0" err="1"/>
+              <a:t>Dau</a:t>
+            </a:r>
+            <a:r>
+              <a:rPr dirty="0"/>
+              <a:t>/Mexico central warehouses, and mobile barcode put-away &amp; picking.</a:t>
             </a:r>
           </a:p>
         </p:txBody>
@@ -6201,6 +6359,7 @@
           <a:lstStyle/>
           <a:p>
             <a:pPr algn="ctr"/>
+            <a:endParaRPr/>
           </a:p>
         </p:txBody>
       </p:sp>
@@ -6267,7 +6426,7 @@
         <p:spPr>
           <a:xfrm>
             <a:off x="6364224" y="2423160"/>
-            <a:ext cx="2194560" cy="3566160"/>
+            <a:ext cx="2194560" cy="1400383"/>
           </a:xfrm>
           <a:prstGeom prst="rect">
             <a:avLst/>
@@ -6288,8 +6447,10 @@
               </a:defRPr>
             </a:pPr>
             <a:r>
-              <a:t>100% BIR CAS Tax &amp; Audit Compliance</a:t>
-            </a:r>
+              <a:rPr lang="en-US" dirty="0"/>
+              <a:t>BIR Reports</a:t>
+            </a:r>
+            <a:endParaRPr dirty="0"/>
           </a:p>
           <a:p>
             <a:pPr>
@@ -6303,7 +6464,8 @@
               </a:defRPr>
             </a:pPr>
             <a:r>
-              <a:t>Built-in Philippine BIR CAS modules: Form 2307, Sales Journal, Purchases Book, Cash Receipts (CRJ), Cash Disbursement (CDJ), and General Ledger.</a:t>
+              <a:rPr dirty="0"/>
+              <a:t>Built-in Philippine BIR CAS modules:  Sales Journal, Purchases Book, Cash Receipts (CRJ), Cash Disbursement (CDJ), and General Ledger.</a:t>
             </a:r>
           </a:p>
         </p:txBody>
@@ -6350,6 +6512,7 @@
           <a:lstStyle/>
           <a:p>
             <a:pPr algn="ctr"/>
+            <a:endParaRPr/>
           </a:p>
         </p:txBody>
       </p:sp>
@@ -6466,7 +6629,7 @@
 </file>
 
 <file path=ppt/slides/slide3.xml><?xml version="1.0" encoding="utf-8"?>
-<p:sld xmlns:a="http://schemas.openxmlformats.org/drawingml/2006/main" xmlns:p="http://schemas.openxmlformats.org/presentationml/2006/main" xmlns:r="http://schemas.openxmlformats.org/officeDocument/2006/relationships">
+<p:sld xmlns:a="http://schemas.openxmlformats.org/drawingml/2006/main" xmlns:r="http://schemas.openxmlformats.org/officeDocument/2006/relationships" xmlns:p="http://schemas.openxmlformats.org/presentationml/2006/main">
   <p:cSld>
     <p:bg>
       <p:bgPr>
@@ -6482,7 +6645,14 @@
         <p:cNvGrpSpPr/>
         <p:nvPr/>
       </p:nvGrpSpPr>
-      <p:grpSpPr/>
+      <p:grpSpPr>
+        <a:xfrm>
+          <a:off x="0" y="0"/>
+          <a:ext cx="0" cy="0"/>
+          <a:chOff x="0" y="0"/>
+          <a:chExt cx="0" cy="0"/>
+        </a:xfrm>
+      </p:grpSpPr>
       <p:sp>
         <p:nvSpPr>
           <p:cNvPr id="2" name="TextBox 1"/>
@@ -6633,6 +6803,7 @@
           <a:lstStyle/>
           <a:p>
             <a:pPr algn="ctr"/>
+            <a:endParaRPr/>
           </a:p>
         </p:txBody>
       </p:sp>
@@ -6794,6 +6965,7 @@
           <a:lstStyle/>
           <a:p>
             <a:pPr algn="ctr"/>
+            <a:endParaRPr/>
           </a:p>
         </p:txBody>
       </p:sp>
@@ -7030,7 +7202,7 @@
 </file>
 
 <file path=ppt/slides/slide4.xml><?xml version="1.0" encoding="utf-8"?>
-<p:sld xmlns:a="http://schemas.openxmlformats.org/drawingml/2006/main" xmlns:p="http://schemas.openxmlformats.org/presentationml/2006/main" xmlns:r="http://schemas.openxmlformats.org/officeDocument/2006/relationships">
+<p:sld xmlns:a="http://schemas.openxmlformats.org/drawingml/2006/main" xmlns:r="http://schemas.openxmlformats.org/officeDocument/2006/relationships" xmlns:p="http://schemas.openxmlformats.org/presentationml/2006/main">
   <p:cSld>
     <p:bg>
       <p:bgPr>
@@ -7046,7 +7218,14 @@
         <p:cNvGrpSpPr/>
         <p:nvPr/>
       </p:nvGrpSpPr>
-      <p:grpSpPr/>
+      <p:grpSpPr>
+        <a:xfrm>
+          <a:off x="0" y="0"/>
+          <a:ext cx="0" cy="0"/>
+          <a:chOff x="0" y="0"/>
+          <a:chExt cx="0" cy="0"/>
+        </a:xfrm>
+      </p:grpSpPr>
       <p:sp>
         <p:nvSpPr>
           <p:cNvPr id="2" name="TextBox 1"/>
@@ -7197,6 +7376,7 @@
           <a:lstStyle/>
           <a:p>
             <a:pPr algn="ctr"/>
+            <a:endParaRPr/>
           </a:p>
         </p:txBody>
       </p:sp>
@@ -7238,7 +7418,7 @@
           </a:fontRef>
         </p:style>
         <p:txBody>
-          <a:bodyPr rtlCol="0" anchor="ctr" wrap="square"/>
+          <a:bodyPr wrap="square" rtlCol="0" anchor="ctr"/>
           <a:lstStyle/>
           <a:p>
             <a:pPr algn="ctr">
@@ -7438,6 +7618,7 @@
           <a:lstStyle/>
           <a:p>
             <a:pPr algn="ctr"/>
+            <a:endParaRPr/>
           </a:p>
         </p:txBody>
       </p:sp>
@@ -7479,7 +7660,7 @@
           </a:fontRef>
         </p:style>
         <p:txBody>
-          <a:bodyPr rtlCol="0" anchor="ctr" wrap="square"/>
+          <a:bodyPr wrap="square" rtlCol="0" anchor="ctr"/>
           <a:lstStyle/>
           <a:p>
             <a:pPr algn="ctr">
@@ -7664,6 +7845,7 @@
           <a:lstStyle/>
           <a:p>
             <a:pPr algn="ctr"/>
+            <a:endParaRPr/>
           </a:p>
         </p:txBody>
       </p:sp>
@@ -7705,7 +7887,7 @@
           </a:fontRef>
         </p:style>
         <p:txBody>
-          <a:bodyPr rtlCol="0" anchor="ctr" wrap="square"/>
+          <a:bodyPr wrap="square" rtlCol="0" anchor="ctr"/>
           <a:lstStyle/>
           <a:p>
             <a:pPr algn="ctr">
@@ -7890,6 +8072,7 @@
           <a:lstStyle/>
           <a:p>
             <a:pPr algn="ctr"/>
+            <a:endParaRPr/>
           </a:p>
         </p:txBody>
       </p:sp>
@@ -7931,7 +8114,7 @@
           </a:fontRef>
         </p:style>
         <p:txBody>
-          <a:bodyPr rtlCol="0" anchor="ctr" wrap="square"/>
+          <a:bodyPr wrap="square" rtlCol="0" anchor="ctr"/>
           <a:lstStyle/>
           <a:p>
             <a:pPr algn="ctr">
@@ -8083,7 +8266,7 @@
 </file>
 
 <file path=ppt/slides/slide5.xml><?xml version="1.0" encoding="utf-8"?>
-<p:sld xmlns:a="http://schemas.openxmlformats.org/drawingml/2006/main" xmlns:p="http://schemas.openxmlformats.org/presentationml/2006/main" xmlns:r="http://schemas.openxmlformats.org/officeDocument/2006/relationships">
+<p:sld xmlns:a="http://schemas.openxmlformats.org/drawingml/2006/main" xmlns:r="http://schemas.openxmlformats.org/officeDocument/2006/relationships" xmlns:p="http://schemas.openxmlformats.org/presentationml/2006/main">
   <p:cSld>
     <p:bg>
       <p:bgPr>
@@ -8099,7 +8282,14 @@
         <p:cNvGrpSpPr/>
         <p:nvPr/>
       </p:nvGrpSpPr>
-      <p:grpSpPr/>
+      <p:grpSpPr>
+        <a:xfrm>
+          <a:off x="0" y="0"/>
+          <a:ext cx="0" cy="0"/>
+          <a:chOff x="0" y="0"/>
+          <a:chExt cx="0" cy="0"/>
+        </a:xfrm>
+      </p:grpSpPr>
       <p:sp>
         <p:nvSpPr>
           <p:cNvPr id="2" name="TextBox 1"/>
@@ -8274,6 +8464,7 @@
           <a:lstStyle/>
           <a:p>
             <a:pPr algn="ctr"/>
+            <a:endParaRPr/>
           </a:p>
         </p:txBody>
       </p:sp>
@@ -8286,7 +8477,7 @@
         <p:spPr>
           <a:xfrm>
             <a:off x="7955279" y="1828800"/>
-            <a:ext cx="3291840" cy="4114800"/>
+            <a:ext cx="3291840" cy="3313728"/>
           </a:xfrm>
           <a:prstGeom prst="rect">
             <a:avLst/>
@@ -8307,6 +8498,7 @@
               </a:defRPr>
             </a:pPr>
             <a:r>
+              <a:rPr dirty="0"/>
               <a:t>Operational Capabilities</a:t>
             </a:r>
           </a:p>
@@ -8322,7 +8514,8 @@
               </a:defRPr>
             </a:pPr>
             <a:r>
-              <a:t>✔ 38,654 Registered Vehicles</a:t>
+              <a:rPr dirty="0"/>
+              <a:t>✔ Registered Vehicles</a:t>
             </a:r>
           </a:p>
           <a:p>
@@ -8334,6 +8527,7 @@
               </a:defRPr>
             </a:pPr>
             <a:r>
+              <a:rPr dirty="0"/>
               <a:t>    Complete vehicle master registry with VIN, engine, chassis, and make/model tracking.</a:t>
             </a:r>
           </a:p>
@@ -8349,7 +8543,8 @@
               </a:defRPr>
             </a:pPr>
             <a:r>
-              <a:t>✔ ₱2.22M+ Lifetime Revenue</a:t>
+              <a:rPr dirty="0"/>
+              <a:t>✔ Lifetime Revenue</a:t>
             </a:r>
           </a:p>
           <a:p>
@@ -8361,6 +8556,7 @@
               </a:defRPr>
             </a:pPr>
             <a:r>
+              <a:rPr dirty="0"/>
               <a:t>    Live tracking of completed service job orders and counter retail transactions.</a:t>
             </a:r>
           </a:p>
@@ -8376,7 +8572,8 @@
               </a:defRPr>
             </a:pPr>
             <a:r>
-              <a:t>✔ ₱46.99M Stock Valuation</a:t>
+              <a:rPr dirty="0"/>
+              <a:t>✔ Stock Valuation</a:t>
             </a:r>
           </a:p>
           <a:p>
@@ -8388,6 +8585,7 @@
               </a:defRPr>
             </a:pPr>
             <a:r>
+              <a:rPr dirty="0"/>
               <a:t>    Consolidated inventory valuation across 11 warehouse and branch entities.</a:t>
             </a:r>
           </a:p>
@@ -8403,6 +8601,7 @@
               </a:defRPr>
             </a:pPr>
             <a:r>
+              <a:rPr dirty="0"/>
               <a:t>✔ Structured Front-Desk Workflow</a:t>
             </a:r>
           </a:p>
@@ -8415,7 +8614,32 @@
               </a:defRPr>
             </a:pPr>
             <a:r>
-              <a:t>    One-click access from Vehicle Estimate $\rightarrow$ Inspection $\rightarrow$ Job Order $\rightarrow$ Invoicing.</a:t>
+              <a:rPr dirty="0"/>
+              <a:t>    One-click access from Vehicle Estimate </a:t>
+            </a:r>
+            <a:r>
+              <a:rPr lang="en-US" dirty="0"/>
+              <a:t>&gt;</a:t>
+            </a:r>
+            <a:r>
+              <a:rPr dirty="0"/>
+              <a:t> Inspection </a:t>
+            </a:r>
+            <a:r>
+              <a:rPr lang="en-US" dirty="0"/>
+              <a:t>&gt;</a:t>
+            </a:r>
+            <a:r>
+              <a:rPr dirty="0"/>
+              <a:t>Job Order </a:t>
+            </a:r>
+            <a:r>
+              <a:rPr lang="en-US" dirty="0"/>
+              <a:t>&gt;</a:t>
+            </a:r>
+            <a:r>
+              <a:rPr dirty="0"/>
+              <a:t> Invoicing.</a:t>
             </a:r>
           </a:p>
           <a:p>
@@ -8430,6 +8654,7 @@
               </a:defRPr>
             </a:pPr>
             <a:r>
+              <a:rPr dirty="0"/>
               <a:t>✔ Vehicle History Card</a:t>
             </a:r>
           </a:p>
@@ -8442,6 +8667,7 @@
               </a:defRPr>
             </a:pPr>
             <a:r>
+              <a:rPr dirty="0"/>
               <a:t>    Every service, part replaced, and inspection logged under the vehicle plate number.</a:t>
             </a:r>
           </a:p>
@@ -8456,7 +8682,7 @@
 </file>
 
 <file path=ppt/slides/slide6.xml><?xml version="1.0" encoding="utf-8"?>
-<p:sld xmlns:a="http://schemas.openxmlformats.org/drawingml/2006/main" xmlns:p="http://schemas.openxmlformats.org/presentationml/2006/main" xmlns:r="http://schemas.openxmlformats.org/officeDocument/2006/relationships">
+<p:sld xmlns:a="http://schemas.openxmlformats.org/drawingml/2006/main" xmlns:r="http://schemas.openxmlformats.org/officeDocument/2006/relationships" xmlns:p="http://schemas.openxmlformats.org/presentationml/2006/main">
   <p:cSld>
     <p:bg>
       <p:bgPr>
@@ -8472,7 +8698,14 @@
         <p:cNvGrpSpPr/>
         <p:nvPr/>
       </p:nvGrpSpPr>
-      <p:grpSpPr/>
+      <p:grpSpPr>
+        <a:xfrm>
+          <a:off x="0" y="0"/>
+          <a:ext cx="0" cy="0"/>
+          <a:chOff x="0" y="0"/>
+          <a:chExt cx="0" cy="0"/>
+        </a:xfrm>
+      </p:grpSpPr>
       <p:sp>
         <p:nvSpPr>
           <p:cNvPr id="2" name="TextBox 1"/>
@@ -8647,6 +8880,7 @@
           <a:lstStyle/>
           <a:p>
             <a:pPr algn="ctr"/>
+            <a:endParaRPr/>
           </a:p>
         </p:txBody>
       </p:sp>
@@ -8829,7 +9063,7 @@
 </file>
 
 <file path=ppt/slides/slide7.xml><?xml version="1.0" encoding="utf-8"?>
-<p:sld xmlns:a="http://schemas.openxmlformats.org/drawingml/2006/main" xmlns:p="http://schemas.openxmlformats.org/presentationml/2006/main" xmlns:r="http://schemas.openxmlformats.org/officeDocument/2006/relationships">
+<p:sld xmlns:a="http://schemas.openxmlformats.org/drawingml/2006/main" xmlns:r="http://schemas.openxmlformats.org/officeDocument/2006/relationships" xmlns:p="http://schemas.openxmlformats.org/presentationml/2006/main">
   <p:cSld>
     <p:bg>
       <p:bgPr>
@@ -8845,7 +9079,14 @@
         <p:cNvGrpSpPr/>
         <p:nvPr/>
       </p:nvGrpSpPr>
-      <p:grpSpPr/>
+      <p:grpSpPr>
+        <a:xfrm>
+          <a:off x="0" y="0"/>
+          <a:ext cx="0" cy="0"/>
+          <a:chOff x="0" y="0"/>
+          <a:chExt cx="0" cy="0"/>
+        </a:xfrm>
+      </p:grpSpPr>
       <p:sp>
         <p:nvSpPr>
           <p:cNvPr id="2" name="TextBox 1"/>
@@ -9020,6 +9261,7 @@
           <a:lstStyle/>
           <a:p>
             <a:pPr algn="ctr"/>
+            <a:endParaRPr/>
           </a:p>
         </p:txBody>
       </p:sp>
@@ -9202,7 +9444,7 @@
 </file>
 
 <file path=ppt/slides/slide8.xml><?xml version="1.0" encoding="utf-8"?>
-<p:sld xmlns:a="http://schemas.openxmlformats.org/drawingml/2006/main" xmlns:p="http://schemas.openxmlformats.org/presentationml/2006/main" xmlns:r="http://schemas.openxmlformats.org/officeDocument/2006/relationships">
+<p:sld xmlns:a="http://schemas.openxmlformats.org/drawingml/2006/main" xmlns:r="http://schemas.openxmlformats.org/officeDocument/2006/relationships" xmlns:p="http://schemas.openxmlformats.org/presentationml/2006/main">
   <p:cSld>
     <p:bg>
       <p:bgPr>
@@ -9218,7 +9460,14 @@
         <p:cNvGrpSpPr/>
         <p:nvPr/>
       </p:nvGrpSpPr>
-      <p:grpSpPr/>
+      <p:grpSpPr>
+        <a:xfrm>
+          <a:off x="0" y="0"/>
+          <a:ext cx="0" cy="0"/>
+          <a:chOff x="0" y="0"/>
+          <a:chExt cx="0" cy="0"/>
+        </a:xfrm>
+      </p:grpSpPr>
       <p:sp>
         <p:nvSpPr>
           <p:cNvPr id="2" name="TextBox 1"/>
@@ -9300,7 +9549,7 @@
         <p:spPr>
           <a:xfrm>
             <a:off x="731520" y="1170432"/>
-            <a:ext cx="10698480" cy="320040"/>
+            <a:ext cx="10698480" cy="184666"/>
           </a:xfrm>
           <a:prstGeom prst="rect">
             <a:avLst/>
@@ -9322,7 +9571,16 @@
               </a:defRPr>
             </a:pPr>
             <a:r>
-              <a:t>Live submitted service transaction ACC-SINV-2026-00447 at Automan Car Care Center.</a:t>
+              <a:rPr dirty="0"/>
+              <a:t>Live submitted service transaction at </a:t>
+            </a:r>
+            <a:r>
+              <a:rPr dirty="0" err="1"/>
+              <a:t>Automan</a:t>
+            </a:r>
+            <a:r>
+              <a:rPr dirty="0"/>
+              <a:t> Car Care Center.</a:t>
             </a:r>
           </a:p>
         </p:txBody>
@@ -9393,6 +9651,7 @@
           <a:lstStyle/>
           <a:p>
             <a:pPr algn="ctr"/>
+            <a:endParaRPr/>
           </a:p>
         </p:txBody>
       </p:sp>
@@ -9405,7 +9664,7 @@
         <p:spPr>
           <a:xfrm>
             <a:off x="7955279" y="1828800"/>
-            <a:ext cx="3291840" cy="4114800"/>
+            <a:ext cx="3291840" cy="3159839"/>
           </a:xfrm>
           <a:prstGeom prst="rect">
             <a:avLst/>
@@ -9426,7 +9685,12 @@
               </a:defRPr>
             </a:pPr>
             <a:r>
-              <a:t>Automan Pilot Results</a:t>
+              <a:rPr dirty="0" err="1"/>
+              <a:t>Automan</a:t>
+            </a:r>
+            <a:r>
+              <a:rPr dirty="0"/>
+              <a:t> Pilot Results</a:t>
             </a:r>
           </a:p>
           <a:p>
@@ -9441,7 +9705,8 @@
               </a:defRPr>
             </a:pPr>
             <a:r>
-              <a:t>✔ 30 Real Service Transactions</a:t>
+              <a:rPr dirty="0"/>
+              <a:t>✔ Real Service Transactions</a:t>
             </a:r>
           </a:p>
           <a:p>
@@ -9453,7 +9718,8 @@
               </a:defRPr>
             </a:pPr>
             <a:r>
-              <a:t>    30 complete automotive service and repair invoices submitted on VPS totaling ₱107,300.00.</a:t>
+              <a:rPr dirty="0"/>
+              <a:t>    complete automotive service and repair invoices submitted on VPS .</a:t>
             </a:r>
           </a:p>
           <a:p>
@@ -9468,6 +9734,7 @@
               </a:defRPr>
             </a:pPr>
             <a:r>
+              <a:rPr dirty="0"/>
               <a:t>✔ ACC Invoice Series</a:t>
             </a:r>
           </a:p>
@@ -9480,7 +9747,16 @@
               </a:defRPr>
             </a:pPr>
             <a:r>
-              <a:t>    Official Automan numbering format (ACC-SINV-2026-00418 to 00447).</a:t>
+              <a:rPr dirty="0"/>
+              <a:t>    Official </a:t>
+            </a:r>
+            <a:r>
+              <a:rPr dirty="0" err="1"/>
+              <a:t>Automan</a:t>
+            </a:r>
+            <a:r>
+              <a:rPr dirty="0"/>
+              <a:t> numbering format .</a:t>
             </a:r>
           </a:p>
           <a:p>
@@ -9495,6 +9771,7 @@
               </a:defRPr>
             </a:pPr>
             <a:r>
+              <a:rPr dirty="0"/>
               <a:t>✔ Customer &amp; Vehicle Linkage</a:t>
             </a:r>
           </a:p>
@@ -9507,6 +9784,7 @@
               </a:defRPr>
             </a:pPr>
             <a:r>
+              <a:rPr dirty="0"/>
               <a:t>    All invoices tagged with customer names, vehicle plates, labor hours, and parts.</a:t>
             </a:r>
           </a:p>
@@ -9522,6 +9800,7 @@
               </a:defRPr>
             </a:pPr>
             <a:r>
+              <a:rPr dirty="0"/>
               <a:t>✔ Automated Payment Entries</a:t>
             </a:r>
           </a:p>
@@ -9534,7 +9813,16 @@
               </a:defRPr>
             </a:pPr>
             <a:r>
-              <a:t>    Instant reconciliation against Automan Cash/Bank accounts in Philippine Peso (PHP).</a:t>
+              <a:rPr dirty="0"/>
+              <a:t>    Instant reconciliation against </a:t>
+            </a:r>
+            <a:r>
+              <a:rPr dirty="0" err="1"/>
+              <a:t>Automan</a:t>
+            </a:r>
+            <a:r>
+              <a:rPr dirty="0"/>
+              <a:t> Cash/Bank accounts in Philippine Peso (PHP).</a:t>
             </a:r>
           </a:p>
           <a:p>
@@ -9549,6 +9837,7 @@
               </a:defRPr>
             </a:pPr>
             <a:r>
+              <a:rPr dirty="0"/>
               <a:t>✔ Live Stock Deduction</a:t>
             </a:r>
           </a:p>
@@ -9561,7 +9850,16 @@
               </a:defRPr>
             </a:pPr>
             <a:r>
-              <a:t>    Automatic inventory ledger impact on Automan local warehouse stock.</a:t>
+              <a:rPr dirty="0"/>
+              <a:t>    Automatic inventory ledger impact on </a:t>
+            </a:r>
+            <a:r>
+              <a:rPr dirty="0" err="1"/>
+              <a:t>Automan</a:t>
+            </a:r>
+            <a:r>
+              <a:rPr dirty="0"/>
+              <a:t> local warehouse stock.</a:t>
             </a:r>
           </a:p>
         </p:txBody>
@@ -9575,7 +9873,7 @@
 </file>
 
 <file path=ppt/slides/slide9.xml><?xml version="1.0" encoding="utf-8"?>
-<p:sld xmlns:a="http://schemas.openxmlformats.org/drawingml/2006/main" xmlns:p="http://schemas.openxmlformats.org/presentationml/2006/main" xmlns:r="http://schemas.openxmlformats.org/officeDocument/2006/relationships">
+<p:sld xmlns:a="http://schemas.openxmlformats.org/drawingml/2006/main" xmlns:r="http://schemas.openxmlformats.org/officeDocument/2006/relationships" xmlns:p="http://schemas.openxmlformats.org/presentationml/2006/main">
   <p:cSld>
     <p:bg>
       <p:bgPr>
@@ -9591,7 +9889,14 @@
         <p:cNvGrpSpPr/>
         <p:nvPr/>
       </p:nvGrpSpPr>
-      <p:grpSpPr/>
+      <p:grpSpPr>
+        <a:xfrm>
+          <a:off x="0" y="0"/>
+          <a:ext cx="0" cy="0"/>
+          <a:chOff x="0" y="0"/>
+          <a:chExt cx="0" cy="0"/>
+        </a:xfrm>
+      </p:grpSpPr>
       <p:sp>
         <p:nvSpPr>
           <p:cNvPr id="2" name="TextBox 1"/>
@@ -9637,7 +9942,7 @@
         <p:spPr>
           <a:xfrm>
             <a:off x="731520" y="658368"/>
-            <a:ext cx="10698480" cy="502920"/>
+            <a:ext cx="10698480" cy="338554"/>
           </a:xfrm>
           <a:prstGeom prst="rect">
             <a:avLst/>
@@ -9659,7 +9964,16 @@
               </a:defRPr>
             </a:pPr>
             <a:r>
-              <a:t>Module 5: 100% BIR CAS Philippine Tax &amp; Accounting Suite</a:t>
+              <a:rPr dirty="0"/>
+              <a:t>Module 5: BIR </a:t>
+            </a:r>
+            <a:r>
+              <a:rPr lang="en-US" dirty="0"/>
+              <a:t>Report</a:t>
+            </a:r>
+            <a:r>
+              <a:rPr dirty="0"/>
+              <a:t> Philippine Tax &amp; Accounting Suite</a:t>
             </a:r>
           </a:p>
         </p:txBody>
@@ -9766,6 +10080,7 @@
           <a:lstStyle/>
           <a:p>
             <a:pPr algn="ctr"/>
+            <a:endParaRPr/>
           </a:p>
         </p:txBody>
       </p:sp>
@@ -9778,7 +10093,7 @@
         <p:spPr>
           <a:xfrm>
             <a:off x="7955279" y="1828800"/>
-            <a:ext cx="3291840" cy="4114800"/>
+            <a:ext cx="3291840" cy="3313728"/>
           </a:xfrm>
           <a:prstGeom prst="rect">
             <a:avLst/>
@@ -9799,6 +10114,7 @@
               </a:defRPr>
             </a:pPr>
             <a:r>
+              <a:rPr dirty="0"/>
               <a:t>BIR Compliance Highlights</a:t>
             </a:r>
           </a:p>
@@ -9814,7 +10130,16 @@
               </a:defRPr>
             </a:pPr>
             <a:r>
-              <a:t>✔ BIR Form 2307 Generation</a:t>
+              <a:rPr dirty="0"/>
+              <a:t>✔ BIR </a:t>
+            </a:r>
+            <a:r>
+              <a:rPr lang="en-US" dirty="0"/>
+              <a:t>Report </a:t>
+            </a:r>
+            <a:r>
+              <a:rPr dirty="0"/>
+              <a:t>Generation</a:t>
             </a:r>
           </a:p>
           <a:p>
@@ -9826,6 +10151,7 @@
               </a:defRPr>
             </a:pPr>
             <a:r>
+              <a:rPr dirty="0"/>
               <a:t>    Automated Certificate of Creditable Tax Withheld at Source for B2B transactions.</a:t>
             </a:r>
           </a:p>
@@ -9841,6 +10167,7 @@
               </a:defRPr>
             </a:pPr>
             <a:r>
+              <a:rPr dirty="0"/>
               <a:t>✔ BIR Sales &amp; Purchase Books</a:t>
             </a:r>
           </a:p>
@@ -9853,6 +10180,7 @@
               </a:defRPr>
             </a:pPr>
             <a:r>
+              <a:rPr dirty="0"/>
               <a:t>    One-click generation of Sales Journal and Purchases Book with official TIN headers.</a:t>
             </a:r>
           </a:p>
@@ -9868,6 +10196,7 @@
               </a:defRPr>
             </a:pPr>
             <a:r>
+              <a:rPr dirty="0"/>
               <a:t>✔ Cash Flow Journals (CRJ &amp; CDJ)</a:t>
             </a:r>
           </a:p>
@@ -9880,6 +10209,7 @@
               </a:defRPr>
             </a:pPr>
             <a:r>
+              <a:rPr dirty="0"/>
               <a:t>    Compliant Cash Receipts Journal and Cash Disbursements Journal.</a:t>
             </a:r>
           </a:p>
@@ -9895,6 +10225,7 @@
               </a:defRPr>
             </a:pPr>
             <a:r>
+              <a:rPr dirty="0"/>
               <a:t>✔ General Journal &amp; General Ledger</a:t>
             </a:r>
           </a:p>
@@ -9907,6 +10238,7 @@
               </a:defRPr>
             </a:pPr>
             <a:r>
+              <a:rPr dirty="0"/>
               <a:t>    Standardized accounting ledger with automated VAT 2550 computation.</a:t>
             </a:r>
           </a:p>
@@ -9922,6 +10254,7 @@
               </a:defRPr>
             </a:pPr>
             <a:r>
+              <a:rPr dirty="0"/>
               <a:t>✔ Real-Time Financial Dashboard</a:t>
             </a:r>
           </a:p>
@@ -9934,6 +10267,7 @@
               </a:defRPr>
             </a:pPr>
             <a:r>
+              <a:rPr dirty="0"/>
               <a:t>    Live Profit &amp; Loss, Accounts Receivable, and Payables tracking across all entities.</a:t>
             </a:r>
           </a:p>

--- a/docs/ERPNEXT_VMS_IMPLEMENTATION_PLAN_DECK.pptx
+++ b/docs/ERPNEXT_VMS_IMPLEMENTATION_PLAN_DECK.pptx
@@ -17,6 +17,7 @@
     <p:sldId id="265" r:id="rId11"/>
     <p:sldId id="266" r:id="rId12"/>
     <p:sldId id="267" r:id="rId13"/>
+    <p:sldId id="268" r:id="rId14"/>
   </p:sldIdLst>
   <p:sldSz cx="12192000" cy="6858000"/>
   <p:notesSz cx="6858000" cy="9144000"/>
@@ -313,7 +314,7 @@
           <a:p>
             <a:fld id="{5BCAD085-E8A6-8845-BD4E-CB4CCA059FC4}" type="datetimeFigureOut">
               <a:rPr lang="en-US" smtClean="0"/>
-              <a:t>9/10/2026</a:t>
+              <a:t>9/11/2026</a:t>
             </a:fld>
             <a:endParaRPr lang="en-US"/>
           </a:p>
@@ -481,7 +482,7 @@
           <a:p>
             <a:fld id="{5BCAD085-E8A6-8845-BD4E-CB4CCA059FC4}" type="datetimeFigureOut">
               <a:rPr lang="en-US" smtClean="0"/>
-              <a:t>9/10/2026</a:t>
+              <a:t>9/11/2026</a:t>
             </a:fld>
             <a:endParaRPr lang="en-US"/>
           </a:p>
@@ -659,7 +660,7 @@
           <a:p>
             <a:fld id="{5BCAD085-E8A6-8845-BD4E-CB4CCA059FC4}" type="datetimeFigureOut">
               <a:rPr lang="en-US" smtClean="0"/>
-              <a:t>9/10/2026</a:t>
+              <a:t>9/11/2026</a:t>
             </a:fld>
             <a:endParaRPr lang="en-US"/>
           </a:p>
@@ -827,7 +828,7 @@
           <a:p>
             <a:fld id="{5BCAD085-E8A6-8845-BD4E-CB4CCA059FC4}" type="datetimeFigureOut">
               <a:rPr lang="en-US" smtClean="0"/>
-              <a:t>9/10/2026</a:t>
+              <a:t>9/11/2026</a:t>
             </a:fld>
             <a:endParaRPr lang="en-US"/>
           </a:p>
@@ -1072,7 +1073,7 @@
           <a:p>
             <a:fld id="{5BCAD085-E8A6-8845-BD4E-CB4CCA059FC4}" type="datetimeFigureOut">
               <a:rPr lang="en-US" smtClean="0"/>
-              <a:t>9/10/2026</a:t>
+              <a:t>9/11/2026</a:t>
             </a:fld>
             <a:endParaRPr lang="en-US"/>
           </a:p>
@@ -1357,7 +1358,7 @@
           <a:p>
             <a:fld id="{5BCAD085-E8A6-8845-BD4E-CB4CCA059FC4}" type="datetimeFigureOut">
               <a:rPr lang="en-US" smtClean="0"/>
-              <a:t>9/10/2026</a:t>
+              <a:t>9/11/2026</a:t>
             </a:fld>
             <a:endParaRPr lang="en-US"/>
           </a:p>
@@ -1776,7 +1777,7 @@
           <a:p>
             <a:fld id="{5BCAD085-E8A6-8845-BD4E-CB4CCA059FC4}" type="datetimeFigureOut">
               <a:rPr lang="en-US" smtClean="0"/>
-              <a:t>9/10/2026</a:t>
+              <a:t>9/11/2026</a:t>
             </a:fld>
             <a:endParaRPr lang="en-US"/>
           </a:p>
@@ -1893,7 +1894,7 @@
           <a:p>
             <a:fld id="{5BCAD085-E8A6-8845-BD4E-CB4CCA059FC4}" type="datetimeFigureOut">
               <a:rPr lang="en-US" smtClean="0"/>
-              <a:t>9/10/2026</a:t>
+              <a:t>9/11/2026</a:t>
             </a:fld>
             <a:endParaRPr lang="en-US"/>
           </a:p>
@@ -1988,7 +1989,7 @@
           <a:p>
             <a:fld id="{5BCAD085-E8A6-8845-BD4E-CB4CCA059FC4}" type="datetimeFigureOut">
               <a:rPr lang="en-US" smtClean="0"/>
-              <a:t>9/10/2026</a:t>
+              <a:t>9/11/2026</a:t>
             </a:fld>
             <a:endParaRPr lang="en-US"/>
           </a:p>
@@ -2263,7 +2264,7 @@
           <a:p>
             <a:fld id="{5BCAD085-E8A6-8845-BD4E-CB4CCA059FC4}" type="datetimeFigureOut">
               <a:rPr lang="en-US" smtClean="0"/>
-              <a:t>9/10/2026</a:t>
+              <a:t>9/11/2026</a:t>
             </a:fld>
             <a:endParaRPr lang="en-US"/>
           </a:p>
@@ -2515,7 +2516,7 @@
           <a:p>
             <a:fld id="{5BCAD085-E8A6-8845-BD4E-CB4CCA059FC4}" type="datetimeFigureOut">
               <a:rPr lang="en-US" smtClean="0"/>
-              <a:t>9/10/2026</a:t>
+              <a:t>9/11/2026</a:t>
             </a:fld>
             <a:endParaRPr lang="en-US"/>
           </a:p>
@@ -2726,7 +2727,7 @@
           <a:p>
             <a:fld id="{5BCAD085-E8A6-8845-BD4E-CB4CCA059FC4}" type="datetimeFigureOut">
               <a:rPr lang="en-US" smtClean="0"/>
-              <a:t>9/10/2026</a:t>
+              <a:t>9/11/2026</a:t>
             </a:fld>
             <a:endParaRPr lang="en-US"/>
           </a:p>
@@ -5867,6 +5868,288 @@
         </p:txBody>
       </p:sp>
     </p:spTree>
+  </p:cSld>
+  <p:clrMapOvr>
+    <a:masterClrMapping/>
+  </p:clrMapOvr>
+</p:sld>
+</file>
+
+<file path=ppt/slides/slide13.xml><?xml version="1.0" encoding="utf-8"?>
+<p:sld xmlns:a="http://schemas.openxmlformats.org/drawingml/2006/main" xmlns:r="http://schemas.openxmlformats.org/officeDocument/2006/relationships" xmlns:p="http://schemas.openxmlformats.org/presentationml/2006/main">
+  <p:cSld>
+    <p:bg>
+      <p:bgPr>
+        <a:solidFill>
+          <a:srgbClr val="0F172A"/>
+        </a:solidFill>
+        <a:effectLst/>
+      </p:bgPr>
+    </p:bg>
+    <p:spTree>
+      <p:nvGrpSpPr>
+        <p:cNvPr id="1" name=""/>
+        <p:cNvGrpSpPr/>
+        <p:nvPr/>
+      </p:nvGrpSpPr>
+      <p:grpSpPr>
+        <a:xfrm>
+          <a:off x="0" y="0"/>
+          <a:ext cx="0" cy="0"/>
+          <a:chOff x="0" y="0"/>
+          <a:chExt cx="0" cy="0"/>
+        </a:xfrm>
+      </p:grpSpPr>
+      <p:sp>
+        <p:nvSpPr>
+          <p:cNvPr id="2" name="TextBox 1"/>
+          <p:cNvSpPr txBox="1"/>
+          <p:nvPr/>
+        </p:nvSpPr>
+        <p:spPr>
+          <a:xfrm>
+            <a:off x="731520" y="365760"/>
+            <a:ext cx="10698480" cy="320040"/>
+          </a:xfrm>
+          <a:prstGeom prst="rect">
+            <a:avLst/>
+          </a:prstGeom>
+          <a:noFill/>
+        </p:spPr>
+        <p:txBody>
+          <a:bodyPr wrap="square" lIns="0" tIns="0" rIns="0" bIns="0">
+            <a:spAutoFit/>
+          </a:bodyPr>
+          <a:lstStyle/>
+          <a:p>
+            <a:pPr>
+              <a:defRPr sz="1100" b="1">
+                <a:solidFill>
+                  <a:srgbClr val="0EA5E9"/>
+                </a:solidFill>
+                <a:latin typeface="Arial"/>
+              </a:defRPr>
+            </a:pPr>
+            <a:r>
+              <a:t>MILESTONE TIMELINE</a:t>
+            </a:r>
+          </a:p>
+        </p:txBody>
+      </p:sp>
+      <p:sp>
+        <p:nvSpPr>
+          <p:cNvPr id="3" name="TextBox 2"/>
+          <p:cNvSpPr txBox="1"/>
+          <p:nvPr/>
+        </p:nvSpPr>
+        <p:spPr>
+          <a:xfrm>
+            <a:off x="731520" y="658368"/>
+            <a:ext cx="10698480" cy="338554"/>
+          </a:xfrm>
+          <a:prstGeom prst="rect">
+            <a:avLst/>
+          </a:prstGeom>
+          <a:noFill/>
+        </p:spPr>
+        <p:txBody>
+          <a:bodyPr wrap="square" lIns="0" tIns="0" rIns="0" bIns="0">
+            <a:spAutoFit/>
+          </a:bodyPr>
+          <a:lstStyle/>
+          <a:p>
+            <a:pPr>
+              <a:defRPr sz="2200" b="1">
+                <a:solidFill>
+                  <a:srgbClr val="F8FAFC"/>
+                </a:solidFill>
+                <a:latin typeface="Arial"/>
+              </a:defRPr>
+            </a:pPr>
+            <a:r>
+              <a:rPr lang="en-PH" dirty="0" err="1"/>
+              <a:t>ERPNext</a:t>
+            </a:r>
+            <a:r>
+              <a:rPr lang="en-PH" dirty="0"/>
+              <a:t> VPS Architecture</a:t>
+            </a:r>
+            <a:endParaRPr dirty="0"/>
+          </a:p>
+        </p:txBody>
+      </p:sp>
+      <p:sp>
+        <p:nvSpPr>
+          <p:cNvPr id="4" name="TextBox 3"/>
+          <p:cNvSpPr txBox="1"/>
+          <p:nvPr/>
+        </p:nvSpPr>
+        <p:spPr>
+          <a:xfrm>
+            <a:off x="731520" y="1170432"/>
+            <a:ext cx="10698480" cy="184666"/>
+          </a:xfrm>
+          <a:prstGeom prst="rect">
+            <a:avLst/>
+          </a:prstGeom>
+          <a:noFill/>
+        </p:spPr>
+        <p:txBody>
+          <a:bodyPr wrap="square" lIns="0" tIns="0" rIns="0" bIns="0">
+            <a:spAutoFit/>
+          </a:bodyPr>
+          <a:lstStyle/>
+          <a:p>
+            <a:pPr>
+              <a:defRPr sz="1200">
+                <a:solidFill>
+                  <a:srgbClr val="94A3B8"/>
+                </a:solidFill>
+                <a:latin typeface="Arial"/>
+              </a:defRPr>
+            </a:pPr>
+            <a:r>
+              <a:rPr lang="fr-FR" dirty="0"/>
+              <a:t>38.247.138.224:10017 · Frappe v16.31 · </a:t>
+            </a:r>
+            <a:r>
+              <a:rPr lang="fr-FR" dirty="0" err="1"/>
+              <a:t>ERPNext</a:t>
+            </a:r>
+            <a:r>
+              <a:rPr lang="fr-FR" dirty="0"/>
+              <a:t> v16.32.3 · PostgreSQL 16 + Redis 7 · Docker Compose (4 services)</a:t>
+            </a:r>
+            <a:endParaRPr dirty="0"/>
+          </a:p>
+        </p:txBody>
+      </p:sp>
+      <p:pic>
+        <p:nvPicPr>
+          <p:cNvPr id="21" name="Picture 20">
+            <a:extLst>
+              <a:ext uri="{FF2B5EF4-FFF2-40B4-BE49-F238E27FC236}">
+                <a16:creationId xmlns:a16="http://schemas.microsoft.com/office/drawing/2014/main" id="{42361E1F-8B0F-4EDA-B018-A60C3D58C8B9}"/>
+              </a:ext>
+            </a:extLst>
+          </p:cNvPr>
+          <p:cNvPicPr>
+            <a:picLocks noChangeAspect="1"/>
+          </p:cNvPicPr>
+          <p:nvPr/>
+        </p:nvPicPr>
+        <p:blipFill>
+          <a:blip r:embed="rId2"/>
+          <a:stretch>
+            <a:fillRect/>
+          </a:stretch>
+        </p:blipFill>
+        <p:spPr>
+          <a:xfrm>
+            <a:off x="194191" y="1528608"/>
+            <a:ext cx="6368929" cy="5032702"/>
+          </a:xfrm>
+          <a:prstGeom prst="rect">
+            <a:avLst/>
+          </a:prstGeom>
+        </p:spPr>
+      </p:pic>
+      <p:pic>
+        <p:nvPicPr>
+          <p:cNvPr id="22" name="Picture 21">
+            <a:extLst>
+              <a:ext uri="{FF2B5EF4-FFF2-40B4-BE49-F238E27FC236}">
+                <a16:creationId xmlns:a16="http://schemas.microsoft.com/office/drawing/2014/main" id="{AB3943EB-DD7B-4859-8F06-CEFCD5971C78}"/>
+              </a:ext>
+            </a:extLst>
+          </p:cNvPr>
+          <p:cNvPicPr>
+            <a:picLocks noChangeAspect="1"/>
+          </p:cNvPicPr>
+          <p:nvPr/>
+        </p:nvPicPr>
+        <p:blipFill>
+          <a:blip r:embed="rId3"/>
+          <a:stretch>
+            <a:fillRect/>
+          </a:stretch>
+        </p:blipFill>
+        <p:spPr>
+          <a:xfrm>
+            <a:off x="6708509" y="1615363"/>
+            <a:ext cx="2552921" cy="2149026"/>
+          </a:xfrm>
+          <a:prstGeom prst="rect">
+            <a:avLst/>
+          </a:prstGeom>
+        </p:spPr>
+      </p:pic>
+      <p:pic>
+        <p:nvPicPr>
+          <p:cNvPr id="23" name="Picture 22">
+            <a:extLst>
+              <a:ext uri="{FF2B5EF4-FFF2-40B4-BE49-F238E27FC236}">
+                <a16:creationId xmlns:a16="http://schemas.microsoft.com/office/drawing/2014/main" id="{035173F4-E3C4-432B-805D-FBAA9675AE00}"/>
+              </a:ext>
+            </a:extLst>
+          </p:cNvPr>
+          <p:cNvPicPr>
+            <a:picLocks noChangeAspect="1"/>
+          </p:cNvPicPr>
+          <p:nvPr/>
+        </p:nvPicPr>
+        <p:blipFill>
+          <a:blip r:embed="rId4"/>
+          <a:stretch>
+            <a:fillRect/>
+          </a:stretch>
+        </p:blipFill>
+        <p:spPr>
+          <a:xfrm>
+            <a:off x="6738991" y="3945412"/>
+            <a:ext cx="2522439" cy="2187130"/>
+          </a:xfrm>
+          <a:prstGeom prst="rect">
+            <a:avLst/>
+          </a:prstGeom>
+        </p:spPr>
+      </p:pic>
+      <p:pic>
+        <p:nvPicPr>
+          <p:cNvPr id="24" name="Picture 23">
+            <a:extLst>
+              <a:ext uri="{FF2B5EF4-FFF2-40B4-BE49-F238E27FC236}">
+                <a16:creationId xmlns:a16="http://schemas.microsoft.com/office/drawing/2014/main" id="{A681AB87-65F6-4F0B-9809-F75115090701}"/>
+              </a:ext>
+            </a:extLst>
+          </p:cNvPr>
+          <p:cNvPicPr>
+            <a:picLocks noChangeAspect="1"/>
+          </p:cNvPicPr>
+          <p:nvPr/>
+        </p:nvPicPr>
+        <p:blipFill>
+          <a:blip r:embed="rId5"/>
+          <a:stretch>
+            <a:fillRect/>
+          </a:stretch>
+        </p:blipFill>
+        <p:spPr>
+          <a:xfrm>
+            <a:off x="9406819" y="1615363"/>
+            <a:ext cx="2591025" cy="2149026"/>
+          </a:xfrm>
+          <a:prstGeom prst="rect">
+            <a:avLst/>
+          </a:prstGeom>
+        </p:spPr>
+      </p:pic>
+    </p:spTree>
+    <p:extLst>
+      <p:ext uri="{BB962C8B-B14F-4D97-AF65-F5344CB8AC3E}">
+        <p14:creationId xmlns:p14="http://schemas.microsoft.com/office/powerpoint/2010/main" val="2550550508"/>
+      </p:ext>
+    </p:extLst>
   </p:cSld>
   <p:clrMapOvr>
     <a:masterClrMapping/>
